--- a/青年聖歌II/(青年聖歌II24)神同在.pptx
+++ b/青年聖歌II/(青年聖歌II24)神同在.pptx
@@ -173,7 +173,7 @@
           <a:lstStyle/>
           <a:p>
             <a:r>
-              <a:rPr lang="en-US" altLang="zh-TW" smtClean="0"/>
+              <a:rPr lang="en-US" altLang="zh-TW"/>
               <a:t>Click to edit Master title style</a:t>
             </a:r>
             <a:endParaRPr lang="zh-TW" altLang="en-US"/>
@@ -292,7 +292,7 @@
           </a:lstStyle>
           <a:p>
             <a:r>
-              <a:rPr lang="en-US" altLang="zh-TW" smtClean="0"/>
+              <a:rPr lang="en-US" altLang="zh-TW"/>
               <a:t>Click to edit Master subtitle style</a:t>
             </a:r>
             <a:endParaRPr lang="zh-TW" altLang="en-US"/>
@@ -316,7 +316,7 @@
           <a:p>
             <a:fld id="{82913FF2-39C9-40A1-A02E-2FA867710920}" type="datetimeFigureOut">
               <a:rPr lang="zh-TW" altLang="en-US" smtClean="0"/>
-              <a:t>2023/10/21</a:t>
+              <a:t>2024/6/8</a:t>
             </a:fld>
             <a:endParaRPr lang="zh-TW" altLang="en-US"/>
           </a:p>
@@ -410,7 +410,7 @@
           <a:lstStyle/>
           <a:p>
             <a:r>
-              <a:rPr lang="en-US" altLang="zh-TW" smtClean="0"/>
+              <a:rPr lang="en-US" altLang="zh-TW"/>
               <a:t>Click to edit Master title style</a:t>
             </a:r>
             <a:endParaRPr lang="zh-TW" altLang="en-US"/>
@@ -434,35 +434,35 @@
           <a:p>
             <a:pPr lvl="0"/>
             <a:r>
-              <a:rPr lang="en-US" altLang="zh-TW" smtClean="0"/>
+              <a:rPr lang="en-US" altLang="zh-TW"/>
               <a:t>Edit Master text styles</a:t>
             </a:r>
           </a:p>
           <a:p>
             <a:pPr lvl="1"/>
             <a:r>
-              <a:rPr lang="en-US" altLang="zh-TW" smtClean="0"/>
+              <a:rPr lang="en-US" altLang="zh-TW"/>
               <a:t>Second level</a:t>
             </a:r>
           </a:p>
           <a:p>
             <a:pPr lvl="2"/>
             <a:r>
-              <a:rPr lang="en-US" altLang="zh-TW" smtClean="0"/>
+              <a:rPr lang="en-US" altLang="zh-TW"/>
               <a:t>Third level</a:t>
             </a:r>
           </a:p>
           <a:p>
             <a:pPr lvl="3"/>
             <a:r>
-              <a:rPr lang="en-US" altLang="zh-TW" smtClean="0"/>
+              <a:rPr lang="en-US" altLang="zh-TW"/>
               <a:t>Fourth level</a:t>
             </a:r>
           </a:p>
           <a:p>
             <a:pPr lvl="4"/>
             <a:r>
-              <a:rPr lang="en-US" altLang="zh-TW" smtClean="0"/>
+              <a:rPr lang="en-US" altLang="zh-TW"/>
               <a:t>Fifth level</a:t>
             </a:r>
             <a:endParaRPr lang="zh-TW" altLang="en-US"/>
@@ -486,7 +486,7 @@
           <a:p>
             <a:fld id="{82913FF2-39C9-40A1-A02E-2FA867710920}" type="datetimeFigureOut">
               <a:rPr lang="zh-TW" altLang="en-US" smtClean="0"/>
-              <a:t>2023/10/21</a:t>
+              <a:t>2024/6/8</a:t>
             </a:fld>
             <a:endParaRPr lang="zh-TW" altLang="en-US"/>
           </a:p>
@@ -585,7 +585,7 @@
           <a:lstStyle/>
           <a:p>
             <a:r>
-              <a:rPr lang="en-US" altLang="zh-TW" smtClean="0"/>
+              <a:rPr lang="en-US" altLang="zh-TW"/>
               <a:t>Click to edit Master title style</a:t>
             </a:r>
             <a:endParaRPr lang="zh-TW" altLang="en-US"/>
@@ -614,35 +614,35 @@
           <a:p>
             <a:pPr lvl="0"/>
             <a:r>
-              <a:rPr lang="en-US" altLang="zh-TW" smtClean="0"/>
+              <a:rPr lang="en-US" altLang="zh-TW"/>
               <a:t>Edit Master text styles</a:t>
             </a:r>
           </a:p>
           <a:p>
             <a:pPr lvl="1"/>
             <a:r>
-              <a:rPr lang="en-US" altLang="zh-TW" smtClean="0"/>
+              <a:rPr lang="en-US" altLang="zh-TW"/>
               <a:t>Second level</a:t>
             </a:r>
           </a:p>
           <a:p>
             <a:pPr lvl="2"/>
             <a:r>
-              <a:rPr lang="en-US" altLang="zh-TW" smtClean="0"/>
+              <a:rPr lang="en-US" altLang="zh-TW"/>
               <a:t>Third level</a:t>
             </a:r>
           </a:p>
           <a:p>
             <a:pPr lvl="3"/>
             <a:r>
-              <a:rPr lang="en-US" altLang="zh-TW" smtClean="0"/>
+              <a:rPr lang="en-US" altLang="zh-TW"/>
               <a:t>Fourth level</a:t>
             </a:r>
           </a:p>
           <a:p>
             <a:pPr lvl="4"/>
             <a:r>
-              <a:rPr lang="en-US" altLang="zh-TW" smtClean="0"/>
+              <a:rPr lang="en-US" altLang="zh-TW"/>
               <a:t>Fifth level</a:t>
             </a:r>
             <a:endParaRPr lang="zh-TW" altLang="en-US"/>
@@ -666,7 +666,7 @@
           <a:p>
             <a:fld id="{82913FF2-39C9-40A1-A02E-2FA867710920}" type="datetimeFigureOut">
               <a:rPr lang="zh-TW" altLang="en-US" smtClean="0"/>
-              <a:t>2023/10/21</a:t>
+              <a:t>2024/6/8</a:t>
             </a:fld>
             <a:endParaRPr lang="zh-TW" altLang="en-US"/>
           </a:p>
@@ -760,7 +760,7 @@
           <a:lstStyle/>
           <a:p>
             <a:r>
-              <a:rPr lang="en-US" altLang="zh-TW" smtClean="0"/>
+              <a:rPr lang="en-US" altLang="zh-TW"/>
               <a:t>Click to edit Master title style</a:t>
             </a:r>
             <a:endParaRPr lang="zh-TW" altLang="en-US"/>
@@ -784,35 +784,35 @@
           <a:p>
             <a:pPr lvl="0"/>
             <a:r>
-              <a:rPr lang="en-US" altLang="zh-TW" smtClean="0"/>
+              <a:rPr lang="en-US" altLang="zh-TW"/>
               <a:t>Edit Master text styles</a:t>
             </a:r>
           </a:p>
           <a:p>
             <a:pPr lvl="1"/>
             <a:r>
-              <a:rPr lang="en-US" altLang="zh-TW" smtClean="0"/>
+              <a:rPr lang="en-US" altLang="zh-TW"/>
               <a:t>Second level</a:t>
             </a:r>
           </a:p>
           <a:p>
             <a:pPr lvl="2"/>
             <a:r>
-              <a:rPr lang="en-US" altLang="zh-TW" smtClean="0"/>
+              <a:rPr lang="en-US" altLang="zh-TW"/>
               <a:t>Third level</a:t>
             </a:r>
           </a:p>
           <a:p>
             <a:pPr lvl="3"/>
             <a:r>
-              <a:rPr lang="en-US" altLang="zh-TW" smtClean="0"/>
+              <a:rPr lang="en-US" altLang="zh-TW"/>
               <a:t>Fourth level</a:t>
             </a:r>
           </a:p>
           <a:p>
             <a:pPr lvl="4"/>
             <a:r>
-              <a:rPr lang="en-US" altLang="zh-TW" smtClean="0"/>
+              <a:rPr lang="en-US" altLang="zh-TW"/>
               <a:t>Fifth level</a:t>
             </a:r>
             <a:endParaRPr lang="zh-TW" altLang="en-US"/>
@@ -836,7 +836,7 @@
           <a:p>
             <a:fld id="{82913FF2-39C9-40A1-A02E-2FA867710920}" type="datetimeFigureOut">
               <a:rPr lang="zh-TW" altLang="en-US" smtClean="0"/>
-              <a:t>2023/10/21</a:t>
+              <a:t>2024/6/8</a:t>
             </a:fld>
             <a:endParaRPr lang="zh-TW" altLang="en-US"/>
           </a:p>
@@ -939,7 +939,7 @@
           </a:lstStyle>
           <a:p>
             <a:r>
-              <a:rPr lang="en-US" altLang="zh-TW" smtClean="0"/>
+              <a:rPr lang="en-US" altLang="zh-TW"/>
               <a:t>Click to edit Master title style</a:t>
             </a:r>
             <a:endParaRPr lang="zh-TW" altLang="en-US"/>
@@ -1059,7 +1059,7 @@
           <a:p>
             <a:pPr lvl="0"/>
             <a:r>
-              <a:rPr lang="en-US" altLang="zh-TW" smtClean="0"/>
+              <a:rPr lang="en-US" altLang="zh-TW"/>
               <a:t>Edit Master text styles</a:t>
             </a:r>
           </a:p>
@@ -1082,7 +1082,7 @@
           <a:p>
             <a:fld id="{82913FF2-39C9-40A1-A02E-2FA867710920}" type="datetimeFigureOut">
               <a:rPr lang="zh-TW" altLang="en-US" smtClean="0"/>
-              <a:t>2023/10/21</a:t>
+              <a:t>2024/6/8</a:t>
             </a:fld>
             <a:endParaRPr lang="zh-TW" altLang="en-US"/>
           </a:p>
@@ -1176,7 +1176,7 @@
           <a:lstStyle/>
           <a:p>
             <a:r>
-              <a:rPr lang="en-US" altLang="zh-TW" smtClean="0"/>
+              <a:rPr lang="en-US" altLang="zh-TW"/>
               <a:t>Click to edit Master title style</a:t>
             </a:r>
             <a:endParaRPr lang="zh-TW" altLang="en-US"/>
@@ -1233,35 +1233,35 @@
           <a:p>
             <a:pPr lvl="0"/>
             <a:r>
-              <a:rPr lang="en-US" altLang="zh-TW" smtClean="0"/>
+              <a:rPr lang="en-US" altLang="zh-TW"/>
               <a:t>Edit Master text styles</a:t>
             </a:r>
           </a:p>
           <a:p>
             <a:pPr lvl="1"/>
             <a:r>
-              <a:rPr lang="en-US" altLang="zh-TW" smtClean="0"/>
+              <a:rPr lang="en-US" altLang="zh-TW"/>
               <a:t>Second level</a:t>
             </a:r>
           </a:p>
           <a:p>
             <a:pPr lvl="2"/>
             <a:r>
-              <a:rPr lang="en-US" altLang="zh-TW" smtClean="0"/>
+              <a:rPr lang="en-US" altLang="zh-TW"/>
               <a:t>Third level</a:t>
             </a:r>
           </a:p>
           <a:p>
             <a:pPr lvl="3"/>
             <a:r>
-              <a:rPr lang="en-US" altLang="zh-TW" smtClean="0"/>
+              <a:rPr lang="en-US" altLang="zh-TW"/>
               <a:t>Fourth level</a:t>
             </a:r>
           </a:p>
           <a:p>
             <a:pPr lvl="4"/>
             <a:r>
-              <a:rPr lang="en-US" altLang="zh-TW" smtClean="0"/>
+              <a:rPr lang="en-US" altLang="zh-TW"/>
               <a:t>Fifth level</a:t>
             </a:r>
             <a:endParaRPr lang="zh-TW" altLang="en-US"/>
@@ -1318,35 +1318,35 @@
           <a:p>
             <a:pPr lvl="0"/>
             <a:r>
-              <a:rPr lang="en-US" altLang="zh-TW" smtClean="0"/>
+              <a:rPr lang="en-US" altLang="zh-TW"/>
               <a:t>Edit Master text styles</a:t>
             </a:r>
           </a:p>
           <a:p>
             <a:pPr lvl="1"/>
             <a:r>
-              <a:rPr lang="en-US" altLang="zh-TW" smtClean="0"/>
+              <a:rPr lang="en-US" altLang="zh-TW"/>
               <a:t>Second level</a:t>
             </a:r>
           </a:p>
           <a:p>
             <a:pPr lvl="2"/>
             <a:r>
-              <a:rPr lang="en-US" altLang="zh-TW" smtClean="0"/>
+              <a:rPr lang="en-US" altLang="zh-TW"/>
               <a:t>Third level</a:t>
             </a:r>
           </a:p>
           <a:p>
             <a:pPr lvl="3"/>
             <a:r>
-              <a:rPr lang="en-US" altLang="zh-TW" smtClean="0"/>
+              <a:rPr lang="en-US" altLang="zh-TW"/>
               <a:t>Fourth level</a:t>
             </a:r>
           </a:p>
           <a:p>
             <a:pPr lvl="4"/>
             <a:r>
-              <a:rPr lang="en-US" altLang="zh-TW" smtClean="0"/>
+              <a:rPr lang="en-US" altLang="zh-TW"/>
               <a:t>Fifth level</a:t>
             </a:r>
             <a:endParaRPr lang="zh-TW" altLang="en-US"/>
@@ -1370,7 +1370,7 @@
           <a:p>
             <a:fld id="{82913FF2-39C9-40A1-A02E-2FA867710920}" type="datetimeFigureOut">
               <a:rPr lang="zh-TW" altLang="en-US" smtClean="0"/>
-              <a:t>2023/10/21</a:t>
+              <a:t>2024/6/8</a:t>
             </a:fld>
             <a:endParaRPr lang="zh-TW" altLang="en-US"/>
           </a:p>
@@ -1468,7 +1468,7 @@
           </a:lstStyle>
           <a:p>
             <a:r>
-              <a:rPr lang="en-US" altLang="zh-TW" smtClean="0"/>
+              <a:rPr lang="en-US" altLang="zh-TW"/>
               <a:t>Click to edit Master title style</a:t>
             </a:r>
             <a:endParaRPr lang="zh-TW" altLang="en-US"/>
@@ -1534,7 +1534,7 @@
           <a:p>
             <a:pPr lvl="0"/>
             <a:r>
-              <a:rPr lang="en-US" altLang="zh-TW" smtClean="0"/>
+              <a:rPr lang="en-US" altLang="zh-TW"/>
               <a:t>Edit Master text styles</a:t>
             </a:r>
           </a:p>
@@ -1590,35 +1590,35 @@
           <a:p>
             <a:pPr lvl="0"/>
             <a:r>
-              <a:rPr lang="en-US" altLang="zh-TW" smtClean="0"/>
+              <a:rPr lang="en-US" altLang="zh-TW"/>
               <a:t>Edit Master text styles</a:t>
             </a:r>
           </a:p>
           <a:p>
             <a:pPr lvl="1"/>
             <a:r>
-              <a:rPr lang="en-US" altLang="zh-TW" smtClean="0"/>
+              <a:rPr lang="en-US" altLang="zh-TW"/>
               <a:t>Second level</a:t>
             </a:r>
           </a:p>
           <a:p>
             <a:pPr lvl="2"/>
             <a:r>
-              <a:rPr lang="en-US" altLang="zh-TW" smtClean="0"/>
+              <a:rPr lang="en-US" altLang="zh-TW"/>
               <a:t>Third level</a:t>
             </a:r>
           </a:p>
           <a:p>
             <a:pPr lvl="3"/>
             <a:r>
-              <a:rPr lang="en-US" altLang="zh-TW" smtClean="0"/>
+              <a:rPr lang="en-US" altLang="zh-TW"/>
               <a:t>Fourth level</a:t>
             </a:r>
           </a:p>
           <a:p>
             <a:pPr lvl="4"/>
             <a:r>
-              <a:rPr lang="en-US" altLang="zh-TW" smtClean="0"/>
+              <a:rPr lang="en-US" altLang="zh-TW"/>
               <a:t>Fifth level</a:t>
             </a:r>
             <a:endParaRPr lang="zh-TW" altLang="en-US"/>
@@ -1684,7 +1684,7 @@
           <a:p>
             <a:pPr lvl="0"/>
             <a:r>
-              <a:rPr lang="en-US" altLang="zh-TW" smtClean="0"/>
+              <a:rPr lang="en-US" altLang="zh-TW"/>
               <a:t>Edit Master text styles</a:t>
             </a:r>
           </a:p>
@@ -1740,35 +1740,35 @@
           <a:p>
             <a:pPr lvl="0"/>
             <a:r>
-              <a:rPr lang="en-US" altLang="zh-TW" smtClean="0"/>
+              <a:rPr lang="en-US" altLang="zh-TW"/>
               <a:t>Edit Master text styles</a:t>
             </a:r>
           </a:p>
           <a:p>
             <a:pPr lvl="1"/>
             <a:r>
-              <a:rPr lang="en-US" altLang="zh-TW" smtClean="0"/>
+              <a:rPr lang="en-US" altLang="zh-TW"/>
               <a:t>Second level</a:t>
             </a:r>
           </a:p>
           <a:p>
             <a:pPr lvl="2"/>
             <a:r>
-              <a:rPr lang="en-US" altLang="zh-TW" smtClean="0"/>
+              <a:rPr lang="en-US" altLang="zh-TW"/>
               <a:t>Third level</a:t>
             </a:r>
           </a:p>
           <a:p>
             <a:pPr lvl="3"/>
             <a:r>
-              <a:rPr lang="en-US" altLang="zh-TW" smtClean="0"/>
+              <a:rPr lang="en-US" altLang="zh-TW"/>
               <a:t>Fourth level</a:t>
             </a:r>
           </a:p>
           <a:p>
             <a:pPr lvl="4"/>
             <a:r>
-              <a:rPr lang="en-US" altLang="zh-TW" smtClean="0"/>
+              <a:rPr lang="en-US" altLang="zh-TW"/>
               <a:t>Fifth level</a:t>
             </a:r>
             <a:endParaRPr lang="zh-TW" altLang="en-US"/>
@@ -1792,7 +1792,7 @@
           <a:p>
             <a:fld id="{82913FF2-39C9-40A1-A02E-2FA867710920}" type="datetimeFigureOut">
               <a:rPr lang="zh-TW" altLang="en-US" smtClean="0"/>
-              <a:t>2023/10/21</a:t>
+              <a:t>2024/6/8</a:t>
             </a:fld>
             <a:endParaRPr lang="zh-TW" altLang="en-US"/>
           </a:p>
@@ -1886,7 +1886,7 @@
           <a:lstStyle/>
           <a:p>
             <a:r>
-              <a:rPr lang="en-US" altLang="zh-TW" smtClean="0"/>
+              <a:rPr lang="en-US" altLang="zh-TW"/>
               <a:t>Click to edit Master title style</a:t>
             </a:r>
             <a:endParaRPr lang="zh-TW" altLang="en-US"/>
@@ -1910,7 +1910,7 @@
           <a:p>
             <a:fld id="{82913FF2-39C9-40A1-A02E-2FA867710920}" type="datetimeFigureOut">
               <a:rPr lang="zh-TW" altLang="en-US" smtClean="0"/>
-              <a:t>2023/10/21</a:t>
+              <a:t>2024/6/8</a:t>
             </a:fld>
             <a:endParaRPr lang="zh-TW" altLang="en-US"/>
           </a:p>
@@ -2005,7 +2005,7 @@
           <a:p>
             <a:fld id="{82913FF2-39C9-40A1-A02E-2FA867710920}" type="datetimeFigureOut">
               <a:rPr lang="zh-TW" altLang="en-US" smtClean="0"/>
-              <a:t>2023/10/21</a:t>
+              <a:t>2024/6/8</a:t>
             </a:fld>
             <a:endParaRPr lang="zh-TW" altLang="en-US"/>
           </a:p>
@@ -2108,7 +2108,7 @@
           </a:lstStyle>
           <a:p>
             <a:r>
-              <a:rPr lang="en-US" altLang="zh-TW" smtClean="0"/>
+              <a:rPr lang="en-US" altLang="zh-TW"/>
               <a:t>Click to edit Master title style</a:t>
             </a:r>
             <a:endParaRPr lang="zh-TW" altLang="en-US"/>
@@ -2165,35 +2165,35 @@
           <a:p>
             <a:pPr lvl="0"/>
             <a:r>
-              <a:rPr lang="en-US" altLang="zh-TW" smtClean="0"/>
+              <a:rPr lang="en-US" altLang="zh-TW"/>
               <a:t>Edit Master text styles</a:t>
             </a:r>
           </a:p>
           <a:p>
             <a:pPr lvl="1"/>
             <a:r>
-              <a:rPr lang="en-US" altLang="zh-TW" smtClean="0"/>
+              <a:rPr lang="en-US" altLang="zh-TW"/>
               <a:t>Second level</a:t>
             </a:r>
           </a:p>
           <a:p>
             <a:pPr lvl="2"/>
             <a:r>
-              <a:rPr lang="en-US" altLang="zh-TW" smtClean="0"/>
+              <a:rPr lang="en-US" altLang="zh-TW"/>
               <a:t>Third level</a:t>
             </a:r>
           </a:p>
           <a:p>
             <a:pPr lvl="3"/>
             <a:r>
-              <a:rPr lang="en-US" altLang="zh-TW" smtClean="0"/>
+              <a:rPr lang="en-US" altLang="zh-TW"/>
               <a:t>Fourth level</a:t>
             </a:r>
           </a:p>
           <a:p>
             <a:pPr lvl="4"/>
             <a:r>
-              <a:rPr lang="en-US" altLang="zh-TW" smtClean="0"/>
+              <a:rPr lang="en-US" altLang="zh-TW"/>
               <a:t>Fifth level</a:t>
             </a:r>
             <a:endParaRPr lang="zh-TW" altLang="en-US"/>
@@ -2259,7 +2259,7 @@
           <a:p>
             <a:pPr lvl="0"/>
             <a:r>
-              <a:rPr lang="en-US" altLang="zh-TW" smtClean="0"/>
+              <a:rPr lang="en-US" altLang="zh-TW"/>
               <a:t>Edit Master text styles</a:t>
             </a:r>
           </a:p>
@@ -2282,7 +2282,7 @@
           <a:p>
             <a:fld id="{82913FF2-39C9-40A1-A02E-2FA867710920}" type="datetimeFigureOut">
               <a:rPr lang="zh-TW" altLang="en-US" smtClean="0"/>
-              <a:t>2023/10/21</a:t>
+              <a:t>2024/6/8</a:t>
             </a:fld>
             <a:endParaRPr lang="zh-TW" altLang="en-US"/>
           </a:p>
@@ -2385,7 +2385,7 @@
           </a:lstStyle>
           <a:p>
             <a:r>
-              <a:rPr lang="en-US" altLang="zh-TW" smtClean="0"/>
+              <a:rPr lang="en-US" altLang="zh-TW"/>
               <a:t>Click to edit Master title style</a:t>
             </a:r>
             <a:endParaRPr lang="zh-TW" altLang="en-US"/>
@@ -2450,7 +2450,7 @@
           </a:lstStyle>
           <a:p>
             <a:r>
-              <a:rPr lang="en-US" altLang="zh-TW" smtClean="0"/>
+              <a:rPr lang="en-US" altLang="zh-TW"/>
               <a:t>Click icon to add picture</a:t>
             </a:r>
             <a:endParaRPr lang="zh-TW" altLang="en-US"/>
@@ -2516,7 +2516,7 @@
           <a:p>
             <a:pPr lvl="0"/>
             <a:r>
-              <a:rPr lang="en-US" altLang="zh-TW" smtClean="0"/>
+              <a:rPr lang="en-US" altLang="zh-TW"/>
               <a:t>Edit Master text styles</a:t>
             </a:r>
           </a:p>
@@ -2539,7 +2539,7 @@
           <a:p>
             <a:fld id="{82913FF2-39C9-40A1-A02E-2FA867710920}" type="datetimeFigureOut">
               <a:rPr lang="zh-TW" altLang="en-US" smtClean="0"/>
-              <a:t>2023/10/21</a:t>
+              <a:t>2024/6/8</a:t>
             </a:fld>
             <a:endParaRPr lang="zh-TW" altLang="en-US"/>
           </a:p>
@@ -2653,10 +2653,9 @@
           <a:lstStyle/>
           <a:p>
             <a:r>
-              <a:rPr lang="zh-TW" altLang="en-US" smtClean="0"/>
+              <a:rPr lang="zh-TW" altLang="en-US"/>
               <a:t>按一下以編輯母片標題樣式</a:t>
             </a:r>
-            <a:endParaRPr lang="zh-TW" altLang="en-US"/>
           </a:p>
         </p:txBody>
       </p:sp>
@@ -2687,38 +2686,37 @@
           <a:p>
             <a:pPr lvl="0"/>
             <a:r>
-              <a:rPr lang="zh-TW" altLang="en-US" smtClean="0"/>
+              <a:rPr lang="zh-TW" altLang="en-US"/>
               <a:t>按一下以編輯母片文字樣式</a:t>
             </a:r>
           </a:p>
           <a:p>
             <a:pPr lvl="1"/>
             <a:r>
-              <a:rPr lang="zh-TW" altLang="en-US" smtClean="0"/>
+              <a:rPr lang="zh-TW" altLang="en-US"/>
               <a:t>第二層</a:t>
             </a:r>
           </a:p>
           <a:p>
             <a:pPr lvl="2"/>
             <a:r>
-              <a:rPr lang="zh-TW" altLang="en-US" smtClean="0"/>
+              <a:rPr lang="zh-TW" altLang="en-US"/>
               <a:t>第三層</a:t>
             </a:r>
           </a:p>
           <a:p>
             <a:pPr lvl="3"/>
             <a:r>
-              <a:rPr lang="zh-TW" altLang="en-US" smtClean="0"/>
+              <a:rPr lang="zh-TW" altLang="en-US"/>
               <a:t>第四層</a:t>
             </a:r>
           </a:p>
           <a:p>
             <a:pPr lvl="4"/>
             <a:r>
-              <a:rPr lang="zh-TW" altLang="en-US" smtClean="0"/>
+              <a:rPr lang="zh-TW" altLang="en-US"/>
               <a:t>第五層</a:t>
             </a:r>
-            <a:endParaRPr lang="zh-TW" altLang="en-US"/>
           </a:p>
         </p:txBody>
       </p:sp>
@@ -2757,7 +2755,7 @@
           <a:p>
             <a:fld id="{82913FF2-39C9-40A1-A02E-2FA867710920}" type="datetimeFigureOut">
               <a:rPr lang="zh-TW" altLang="en-US" smtClean="0"/>
-              <a:t>2023/10/21</a:t>
+              <a:t>2024/6/8</a:t>
             </a:fld>
             <a:endParaRPr lang="zh-TW" altLang="en-US"/>
           </a:p>
@@ -3222,23 +3220,6 @@
               </a:rPr>
               <a:t>24</a:t>
             </a:r>
-            <a:r>
-              <a:rPr lang="en-US" altLang="zh-CN" sz="7200" b="1" i="1" dirty="0">
-                <a:solidFill>
-                  <a:srgbClr val="660033"/>
-                </a:solidFill>
-                <a:effectLst>
-                  <a:outerShdw blurRad="38100" dist="38100" dir="2700000" algn="tl">
-                    <a:srgbClr val="000000">
-                      <a:alpha val="43137"/>
-                    </a:srgbClr>
-                  </a:outerShdw>
-                </a:effectLst>
-                <a:latin typeface="微軟正黑體" pitchFamily="34" charset="-120"/>
-                <a:ea typeface="微軟正黑體" pitchFamily="34" charset="-120"/>
-              </a:rPr>
-              <a:t/>
-            </a:r>
             <a:br>
               <a:rPr lang="en-US" altLang="zh-CN" sz="7200" b="1" i="1" dirty="0">
                 <a:solidFill>
@@ -3270,24 +3251,7 @@
                 <a:latin typeface="微軟正黑體" pitchFamily="34" charset="-120"/>
                 <a:ea typeface="微軟正黑體" pitchFamily="34" charset="-120"/>
               </a:rPr>
-              <a:t>神</a:t>
-            </a:r>
-            <a:r>
-              <a:rPr lang="zh-TW" altLang="en-US" sz="8000" b="1" dirty="0">
-                <a:solidFill>
-                  <a:srgbClr val="660033"/>
-                </a:solidFill>
-                <a:effectLst>
-                  <a:outerShdw blurRad="38100" dist="38100" dir="2700000" algn="tl">
-                    <a:srgbClr val="000000">
-                      <a:alpha val="43137"/>
-                    </a:srgbClr>
-                  </a:outerShdw>
-                </a:effectLst>
-                <a:latin typeface="微軟正黑體" pitchFamily="34" charset="-120"/>
-                <a:ea typeface="微軟正黑體" pitchFamily="34" charset="-120"/>
-              </a:rPr>
-              <a:t>同在</a:t>
+              <a:t>神同在</a:t>
             </a:r>
           </a:p>
         </p:txBody>
@@ -3302,13 +3266,6 @@
   <p:clrMapOvr>
     <a:masterClrMapping/>
   </p:clrMapOvr>
-  <p:timing>
-    <p:tnLst>
-      <p:par>
-        <p:cTn id="1" dur="indefinite" restart="never" nodeType="tmRoot"/>
-      </p:par>
-    </p:tnLst>
-  </p:timing>
 </p:sld>
 </file>
 
@@ -3377,27 +3334,7 @@
                 <a:latin typeface="Microsoft JhengHei" pitchFamily="34" charset="-120"/>
                 <a:ea typeface="Microsoft JhengHei" pitchFamily="34" charset="-120"/>
               </a:rPr>
-              <a:t>神同在 </a:t>
-            </a:r>
-            <a:r>
-              <a:rPr lang="zh-TW" altLang="en-US" sz="6400" b="1" dirty="0">
-                <a:solidFill>
-                  <a:srgbClr val="660033"/>
-                </a:solidFill>
-                <a:latin typeface="Microsoft JhengHei" pitchFamily="34" charset="-120"/>
-                <a:ea typeface="Microsoft JhengHei" pitchFamily="34" charset="-120"/>
-              </a:rPr>
-              <a:t> 神</a:t>
-            </a:r>
-            <a:r>
-              <a:rPr lang="zh-TW" altLang="en-US" sz="6400" b="1" dirty="0">
-                <a:solidFill>
-                  <a:srgbClr val="660033"/>
-                </a:solidFill>
-                <a:latin typeface="Microsoft JhengHei" pitchFamily="34" charset="-120"/>
-                <a:ea typeface="Microsoft JhengHei" pitchFamily="34" charset="-120"/>
-              </a:rPr>
-              <a:t>同在</a:t>
+              <a:t>神同在  神同在</a:t>
             </a:r>
             <a:endParaRPr lang="en-US" altLang="zh-TW" sz="6400" b="1" dirty="0">
               <a:solidFill>
@@ -3438,39 +3375,7 @@
                   <a:srgbClr val="660033"/>
                 </a:solidFill>
               </a:rPr>
-              <a:t>( </a:t>
-            </a:r>
-            <a:r>
-              <a:rPr lang="en-US" sz="3733" b="1" dirty="0">
-                <a:solidFill>
-                  <a:srgbClr val="660033"/>
-                </a:solidFill>
-              </a:rPr>
-              <a:t>3 </a:t>
-            </a:r>
-            <a:r>
-              <a:rPr lang="en-US" sz="3733" b="1" dirty="0">
-                <a:solidFill>
-                  <a:srgbClr val="660033"/>
-                </a:solidFill>
-              </a:rPr>
-              <a:t>/ </a:t>
-            </a:r>
-            <a:r>
-              <a:rPr lang="en-US" sz="3733" b="1" dirty="0">
-                <a:solidFill>
-                  <a:srgbClr val="660033"/>
-                </a:solidFill>
-              </a:rPr>
-              <a:t>3 </a:t>
-            </a:r>
-            <a:r>
-              <a:rPr lang="en-US" sz="3733" b="1" dirty="0">
-                <a:solidFill>
-                  <a:srgbClr val="660033"/>
-                </a:solidFill>
-              </a:rPr>
-              <a:t>)</a:t>
+              <a:t>( 3 / 3 )</a:t>
             </a:r>
             <a:endParaRPr lang="vi-VN" sz="3733" b="1" dirty="0">
               <a:solidFill>
@@ -3490,13 +3395,6 @@
   <p:clrMapOvr>
     <a:masterClrMapping/>
   </p:clrMapOvr>
-  <p:timing>
-    <p:tnLst>
-      <p:par>
-        <p:cTn id="1" dur="indefinite" restart="never" nodeType="tmRoot"/>
-      </p:par>
-    </p:tnLst>
-  </p:timing>
 </p:sld>
 </file>
 
@@ -3565,27 +3463,7 @@
                 <a:latin typeface="Microsoft JhengHei" pitchFamily="34" charset="-120"/>
                 <a:ea typeface="Microsoft JhengHei" pitchFamily="34" charset="-120"/>
               </a:rPr>
-              <a:t>神同在 </a:t>
-            </a:r>
-            <a:r>
-              <a:rPr lang="zh-TW" altLang="en-US" sz="6400" b="1" dirty="0">
-                <a:solidFill>
-                  <a:srgbClr val="660033"/>
-                </a:solidFill>
-                <a:latin typeface="Microsoft JhengHei" pitchFamily="34" charset="-120"/>
-                <a:ea typeface="Microsoft JhengHei" pitchFamily="34" charset="-120"/>
-              </a:rPr>
-              <a:t> 常</a:t>
-            </a:r>
-            <a:r>
-              <a:rPr lang="zh-TW" altLang="en-US" sz="6400" b="1" dirty="0">
-                <a:solidFill>
-                  <a:srgbClr val="660033"/>
-                </a:solidFill>
-                <a:latin typeface="Microsoft JhengHei" pitchFamily="34" charset="-120"/>
-                <a:ea typeface="Microsoft JhengHei" pitchFamily="34" charset="-120"/>
-              </a:rPr>
-              <a:t>同在</a:t>
+              <a:t>神同在  常同在</a:t>
             </a:r>
           </a:p>
         </p:txBody>
@@ -3619,39 +3497,7 @@
                   <a:srgbClr val="660033"/>
                 </a:solidFill>
               </a:rPr>
-              <a:t>( </a:t>
-            </a:r>
-            <a:r>
-              <a:rPr lang="en-US" sz="3733" b="1" dirty="0">
-                <a:solidFill>
-                  <a:srgbClr val="660033"/>
-                </a:solidFill>
-              </a:rPr>
-              <a:t>3 </a:t>
-            </a:r>
-            <a:r>
-              <a:rPr lang="en-US" sz="3733" b="1" dirty="0">
-                <a:solidFill>
-                  <a:srgbClr val="660033"/>
-                </a:solidFill>
-              </a:rPr>
-              <a:t>/ </a:t>
-            </a:r>
-            <a:r>
-              <a:rPr lang="en-US" sz="3733" b="1" dirty="0">
-                <a:solidFill>
-                  <a:srgbClr val="660033"/>
-                </a:solidFill>
-              </a:rPr>
-              <a:t>3 </a:t>
-            </a:r>
-            <a:r>
-              <a:rPr lang="en-US" sz="3733" b="1" dirty="0">
-                <a:solidFill>
-                  <a:srgbClr val="660033"/>
-                </a:solidFill>
-              </a:rPr>
-              <a:t>)</a:t>
+              <a:t>( 3 / 3 )</a:t>
             </a:r>
             <a:endParaRPr lang="vi-VN" sz="3733" b="1" dirty="0">
               <a:solidFill>
@@ -3671,13 +3517,6 @@
   <p:clrMapOvr>
     <a:masterClrMapping/>
   </p:clrMapOvr>
-  <p:timing>
-    <p:tnLst>
-      <p:par>
-        <p:cTn id="1" dur="indefinite" restart="never" nodeType="tmRoot"/>
-      </p:par>
-    </p:tnLst>
-  </p:timing>
 </p:sld>
 </file>
 
@@ -3731,27 +3570,7 @@
                 <a:latin typeface="Microsoft JhengHei" pitchFamily="34" charset="-120"/>
                 <a:ea typeface="Microsoft JhengHei" pitchFamily="34" charset="-120"/>
               </a:rPr>
-              <a:t>神同</a:t>
-            </a:r>
-            <a:r>
-              <a:rPr lang="zh-TW" altLang="en-US" sz="6400" b="1" dirty="0">
-                <a:solidFill>
-                  <a:srgbClr val="660033"/>
-                </a:solidFill>
-                <a:latin typeface="Microsoft JhengHei" pitchFamily="34" charset="-120"/>
-                <a:ea typeface="Microsoft JhengHei" pitchFamily="34" charset="-120"/>
-              </a:rPr>
-              <a:t>在  常</a:t>
-            </a:r>
-            <a:r>
-              <a:rPr lang="zh-TW" altLang="en-US" sz="6400" b="1" dirty="0">
-                <a:solidFill>
-                  <a:srgbClr val="660033"/>
-                </a:solidFill>
-                <a:latin typeface="Microsoft JhengHei" pitchFamily="34" charset="-120"/>
-                <a:ea typeface="Microsoft JhengHei" pitchFamily="34" charset="-120"/>
-              </a:rPr>
-              <a:t>同在</a:t>
+              <a:t>神同在  常同在</a:t>
             </a:r>
           </a:p>
           <a:p>
@@ -3788,13 +3607,6 @@
   <p:clrMapOvr>
     <a:masterClrMapping/>
   </p:clrMapOvr>
-  <p:timing>
-    <p:tnLst>
-      <p:par>
-        <p:cTn id="1" dur="indefinite" restart="never" nodeType="tmRoot"/>
-      </p:par>
-    </p:tnLst>
-  </p:timing>
 </p:sld>
 </file>
 
@@ -3848,17 +3660,17 @@
                 <a:latin typeface="Microsoft JhengHei" pitchFamily="34" charset="-120"/>
                 <a:ea typeface="Microsoft JhengHei" pitchFamily="34" charset="-120"/>
               </a:rPr>
-              <a:t>我願信靠祂應</a:t>
-            </a:r>
-            <a:r>
-              <a:rPr lang="zh-TW" altLang="en-US" sz="6400" b="1" dirty="0">
+              <a:t>我願信靠祂應許  祂</a:t>
+            </a:r>
+            <a:r>
+              <a:rPr lang="zh-CN" altLang="en-US" sz="6400" b="1" dirty="0">
                 <a:solidFill>
                   <a:srgbClr val="660033"/>
                 </a:solidFill>
                 <a:latin typeface="Microsoft JhengHei" pitchFamily="34" charset="-120"/>
                 <a:ea typeface="Microsoft JhengHei" pitchFamily="34" charset="-120"/>
               </a:rPr>
-              <a:t>許  祂</a:t>
+              <a:t>守</a:t>
             </a:r>
             <a:r>
               <a:rPr lang="zh-TW" altLang="en-US" sz="6400" b="1" dirty="0">
@@ -3868,17 +3680,7 @@
                 <a:latin typeface="Microsoft JhengHei" pitchFamily="34" charset="-120"/>
                 <a:ea typeface="Microsoft JhengHei" pitchFamily="34" charset="-120"/>
               </a:rPr>
-              <a:t>手信實到萬</a:t>
-            </a:r>
-            <a:r>
-              <a:rPr lang="zh-TW" altLang="en-US" sz="6400" b="1" dirty="0">
-                <a:solidFill>
-                  <a:srgbClr val="660033"/>
-                </a:solidFill>
-                <a:latin typeface="Microsoft JhengHei" pitchFamily="34" charset="-120"/>
-                <a:ea typeface="Microsoft JhengHei" pitchFamily="34" charset="-120"/>
-              </a:rPr>
-              <a:t>代</a:t>
+              <a:t>信實到萬代</a:t>
             </a:r>
             <a:endParaRPr lang="en-US" altLang="zh-TW" sz="6400" b="1" dirty="0">
               <a:solidFill>
@@ -3893,24 +3695,14 @@
               <a:buNone/>
             </a:pPr>
             <a:r>
-              <a:rPr lang="zh-TW" altLang="en-US" sz="6400" b="1" dirty="0">
+              <a:rPr lang="zh-TW" altLang="en-US" sz="6400" b="1">
                 <a:solidFill>
                   <a:srgbClr val="660033"/>
                 </a:solidFill>
                 <a:latin typeface="Microsoft JhengHei" pitchFamily="34" charset="-120"/>
                 <a:ea typeface="Microsoft JhengHei" pitchFamily="34" charset="-120"/>
               </a:rPr>
-              <a:t>當我真需要一友神同</a:t>
-            </a:r>
-            <a:r>
-              <a:rPr lang="zh-TW" altLang="en-US" sz="6400" b="1" dirty="0">
-                <a:solidFill>
-                  <a:srgbClr val="660033"/>
-                </a:solidFill>
-                <a:latin typeface="Microsoft JhengHei" pitchFamily="34" charset="-120"/>
-                <a:ea typeface="Microsoft JhengHei" pitchFamily="34" charset="-120"/>
-              </a:rPr>
-              <a:t>在</a:t>
+              <a:t>當我真需要一友  神同在</a:t>
             </a:r>
             <a:endParaRPr lang="zh-TW" altLang="en-US" sz="6400" b="1" dirty="0">
               <a:solidFill>
@@ -3932,13 +3724,6 @@
   <p:clrMapOvr>
     <a:masterClrMapping/>
   </p:clrMapOvr>
-  <p:timing>
-    <p:tnLst>
-      <p:par>
-        <p:cTn id="1" dur="indefinite" restart="never" nodeType="tmRoot"/>
-      </p:par>
-    </p:tnLst>
-  </p:timing>
 </p:sld>
 </file>
 
@@ -3992,8 +3777,13 @@
                 <a:latin typeface="Microsoft JhengHei" pitchFamily="34" charset="-120"/>
                 <a:ea typeface="Microsoft JhengHei" pitchFamily="34" charset="-120"/>
               </a:rPr>
-              <a:t>當</a:t>
-            </a:r>
+              <a:t>當我需要朋友傾訢我苦惱</a:t>
+            </a:r>
+          </a:p>
+          <a:p>
+            <a:pPr algn="ctr">
+              <a:buNone/>
+            </a:pPr>
             <a:r>
               <a:rPr lang="zh-TW" altLang="en-US" sz="6400" b="1" dirty="0">
                 <a:solidFill>
@@ -4002,42 +3792,7 @@
                 <a:latin typeface="Microsoft JhengHei" pitchFamily="34" charset="-120"/>
                 <a:ea typeface="Microsoft JhengHei" pitchFamily="34" charset="-120"/>
               </a:rPr>
-              <a:t>我需要朋友傾訢我苦惱</a:t>
-            </a:r>
-          </a:p>
-          <a:p>
-            <a:pPr algn="ctr">
-              <a:buNone/>
-            </a:pPr>
-            <a:r>
-              <a:rPr lang="zh-TW" altLang="en-US" sz="6400" b="1" dirty="0">
-                <a:solidFill>
-                  <a:srgbClr val="660033"/>
-                </a:solidFill>
-                <a:latin typeface="Microsoft JhengHei" pitchFamily="34" charset="-120"/>
-                <a:ea typeface="Microsoft JhengHei" pitchFamily="34" charset="-120"/>
-              </a:rPr>
-              <a:t>神同在 </a:t>
-            </a:r>
-            <a:r>
-              <a:rPr lang="zh-TW" altLang="en-US" sz="6400" b="1" dirty="0">
-                <a:solidFill>
-                  <a:srgbClr val="660033"/>
-                </a:solidFill>
-                <a:latin typeface="Microsoft JhengHei" pitchFamily="34" charset="-120"/>
-                <a:ea typeface="Microsoft JhengHei" pitchFamily="34" charset="-120"/>
-              </a:rPr>
-              <a:t> 神</a:t>
-            </a:r>
-            <a:r>
-              <a:rPr lang="zh-TW" altLang="en-US" sz="6400" b="1" dirty="0">
-                <a:solidFill>
-                  <a:srgbClr val="660033"/>
-                </a:solidFill>
-                <a:latin typeface="Microsoft JhengHei" pitchFamily="34" charset="-120"/>
-                <a:ea typeface="Microsoft JhengHei" pitchFamily="34" charset="-120"/>
-              </a:rPr>
-              <a:t>同在</a:t>
+              <a:t>神同在  神同在</a:t>
             </a:r>
           </a:p>
         </p:txBody>
@@ -4071,23 +3826,7 @@
                   <a:srgbClr val="660033"/>
                 </a:solidFill>
               </a:rPr>
-              <a:t>( 1 / </a:t>
-            </a:r>
-            <a:r>
-              <a:rPr lang="en-US" sz="3733" b="1" dirty="0">
-                <a:solidFill>
-                  <a:srgbClr val="660033"/>
-                </a:solidFill>
-              </a:rPr>
-              <a:t>3 </a:t>
-            </a:r>
-            <a:r>
-              <a:rPr lang="en-US" sz="3733" b="1" dirty="0">
-                <a:solidFill>
-                  <a:srgbClr val="660033"/>
-                </a:solidFill>
-              </a:rPr>
-              <a:t>)</a:t>
+              <a:t>( 1 / 3 )</a:t>
             </a:r>
             <a:endParaRPr lang="vi-VN" sz="3733" b="1" dirty="0">
               <a:solidFill>
@@ -4107,13 +3846,6 @@
   <p:clrMapOvr>
     <a:masterClrMapping/>
   </p:clrMapOvr>
-  <p:timing>
-    <p:tnLst>
-      <p:par>
-        <p:cTn id="1" dur="indefinite" restart="never" nodeType="tmRoot"/>
-      </p:par>
-    </p:tnLst>
-  </p:timing>
 </p:sld>
 </file>
 
@@ -4182,27 +3914,7 @@
                 <a:latin typeface="Microsoft JhengHei" pitchFamily="34" charset="-120"/>
                 <a:ea typeface="Microsoft JhengHei" pitchFamily="34" charset="-120"/>
               </a:rPr>
-              <a:t>神同在 </a:t>
-            </a:r>
-            <a:r>
-              <a:rPr lang="zh-TW" altLang="en-US" sz="6400" b="1" dirty="0">
-                <a:solidFill>
-                  <a:srgbClr val="660033"/>
-                </a:solidFill>
-                <a:latin typeface="Microsoft JhengHei" pitchFamily="34" charset="-120"/>
-                <a:ea typeface="Microsoft JhengHei" pitchFamily="34" charset="-120"/>
-              </a:rPr>
-              <a:t> 常</a:t>
-            </a:r>
-            <a:r>
-              <a:rPr lang="zh-TW" altLang="en-US" sz="6400" b="1" dirty="0">
-                <a:solidFill>
-                  <a:srgbClr val="660033"/>
-                </a:solidFill>
-                <a:latin typeface="Microsoft JhengHei" pitchFamily="34" charset="-120"/>
-                <a:ea typeface="Microsoft JhengHei" pitchFamily="34" charset="-120"/>
-              </a:rPr>
-              <a:t>同在</a:t>
+              <a:t>神同在  常同在</a:t>
             </a:r>
           </a:p>
         </p:txBody>
@@ -4236,23 +3948,7 @@
                   <a:srgbClr val="660033"/>
                 </a:solidFill>
               </a:rPr>
-              <a:t>( 1 / </a:t>
-            </a:r>
-            <a:r>
-              <a:rPr lang="en-US" sz="3733" b="1" dirty="0">
-                <a:solidFill>
-                  <a:srgbClr val="660033"/>
-                </a:solidFill>
-              </a:rPr>
-              <a:t>3 </a:t>
-            </a:r>
-            <a:r>
-              <a:rPr lang="en-US" sz="3733" b="1" dirty="0">
-                <a:solidFill>
-                  <a:srgbClr val="660033"/>
-                </a:solidFill>
-              </a:rPr>
-              <a:t>)</a:t>
+              <a:t>( 1 / 3 )</a:t>
             </a:r>
             <a:endParaRPr lang="vi-VN" sz="3733" b="1" dirty="0">
               <a:solidFill>
@@ -4272,13 +3968,6 @@
   <p:clrMapOvr>
     <a:masterClrMapping/>
   </p:clrMapOvr>
-  <p:timing>
-    <p:tnLst>
-      <p:par>
-        <p:cTn id="1" dur="indefinite" restart="never" nodeType="tmRoot"/>
-      </p:par>
-    </p:tnLst>
-  </p:timing>
 </p:sld>
 </file>
 
@@ -4332,27 +4021,7 @@
                 <a:latin typeface="Microsoft JhengHei" pitchFamily="34" charset="-120"/>
                 <a:ea typeface="Microsoft JhengHei" pitchFamily="34" charset="-120"/>
               </a:rPr>
-              <a:t>神同</a:t>
-            </a:r>
-            <a:r>
-              <a:rPr lang="zh-TW" altLang="en-US" sz="6400" b="1" dirty="0">
-                <a:solidFill>
-                  <a:srgbClr val="660033"/>
-                </a:solidFill>
-                <a:latin typeface="Microsoft JhengHei" pitchFamily="34" charset="-120"/>
-                <a:ea typeface="Microsoft JhengHei" pitchFamily="34" charset="-120"/>
-              </a:rPr>
-              <a:t>在  常</a:t>
-            </a:r>
-            <a:r>
-              <a:rPr lang="zh-TW" altLang="en-US" sz="6400" b="1" dirty="0">
-                <a:solidFill>
-                  <a:srgbClr val="660033"/>
-                </a:solidFill>
-                <a:latin typeface="Microsoft JhengHei" pitchFamily="34" charset="-120"/>
-                <a:ea typeface="Microsoft JhengHei" pitchFamily="34" charset="-120"/>
-              </a:rPr>
-              <a:t>同在</a:t>
+              <a:t>神同在  常同在</a:t>
             </a:r>
           </a:p>
           <a:p>
@@ -4389,13 +4058,6 @@
   <p:clrMapOvr>
     <a:masterClrMapping/>
   </p:clrMapOvr>
-  <p:timing>
-    <p:tnLst>
-      <p:par>
-        <p:cTn id="1" dur="indefinite" restart="never" nodeType="tmRoot"/>
-      </p:par>
-    </p:tnLst>
-  </p:timing>
 </p:sld>
 </file>
 
@@ -4449,17 +4111,17 @@
                 <a:latin typeface="Microsoft JhengHei" pitchFamily="34" charset="-120"/>
                 <a:ea typeface="Microsoft JhengHei" pitchFamily="34" charset="-120"/>
               </a:rPr>
-              <a:t>我願信靠祂應</a:t>
-            </a:r>
-            <a:r>
-              <a:rPr lang="zh-TW" altLang="en-US" sz="6400" b="1" dirty="0">
+              <a:t>我願信靠祂應許  祂</a:t>
+            </a:r>
+            <a:r>
+              <a:rPr lang="zh-CN" altLang="en-US" sz="6400" b="1" dirty="0">
                 <a:solidFill>
                   <a:srgbClr val="660033"/>
                 </a:solidFill>
                 <a:latin typeface="Microsoft JhengHei" pitchFamily="34" charset="-120"/>
                 <a:ea typeface="Microsoft JhengHei" pitchFamily="34" charset="-120"/>
               </a:rPr>
-              <a:t>許  祂</a:t>
+              <a:t>守</a:t>
             </a:r>
             <a:r>
               <a:rPr lang="zh-TW" altLang="en-US" sz="6400" b="1" dirty="0">
@@ -4469,17 +4131,7 @@
                 <a:latin typeface="Microsoft JhengHei" pitchFamily="34" charset="-120"/>
                 <a:ea typeface="Microsoft JhengHei" pitchFamily="34" charset="-120"/>
               </a:rPr>
-              <a:t>手信實到萬</a:t>
-            </a:r>
-            <a:r>
-              <a:rPr lang="zh-TW" altLang="en-US" sz="6400" b="1" dirty="0">
-                <a:solidFill>
-                  <a:srgbClr val="660033"/>
-                </a:solidFill>
-                <a:latin typeface="Microsoft JhengHei" pitchFamily="34" charset="-120"/>
-                <a:ea typeface="Microsoft JhengHei" pitchFamily="34" charset="-120"/>
-              </a:rPr>
-              <a:t>代</a:t>
+              <a:t>信實到萬代</a:t>
             </a:r>
             <a:endParaRPr lang="en-US" altLang="zh-TW" sz="6400" b="1" dirty="0">
               <a:solidFill>
@@ -4501,25 +4153,8 @@
                 <a:latin typeface="Microsoft JhengHei" pitchFamily="34" charset="-120"/>
                 <a:ea typeface="Microsoft JhengHei" pitchFamily="34" charset="-120"/>
               </a:rPr>
-              <a:t>當我真需要一友神同</a:t>
-            </a:r>
-            <a:r>
-              <a:rPr lang="zh-TW" altLang="en-US" sz="6400" b="1" dirty="0">
-                <a:solidFill>
-                  <a:srgbClr val="660033"/>
-                </a:solidFill>
-                <a:latin typeface="Microsoft JhengHei" pitchFamily="34" charset="-120"/>
-                <a:ea typeface="Microsoft JhengHei" pitchFamily="34" charset="-120"/>
-              </a:rPr>
-              <a:t>在</a:t>
-            </a:r>
-            <a:endParaRPr lang="zh-TW" altLang="en-US" sz="6400" b="1" dirty="0">
-              <a:solidFill>
-                <a:srgbClr val="660033"/>
-              </a:solidFill>
-              <a:latin typeface="Microsoft JhengHei" pitchFamily="34" charset="-120"/>
-              <a:ea typeface="Microsoft JhengHei" pitchFamily="34" charset="-120"/>
-            </a:endParaRPr>
+              <a:t>當我真需要一友  神同在</a:t>
+            </a:r>
           </a:p>
         </p:txBody>
       </p:sp>
@@ -4533,13 +4168,6 @@
   <p:clrMapOvr>
     <a:masterClrMapping/>
   </p:clrMapOvr>
-  <p:timing>
-    <p:tnLst>
-      <p:par>
-        <p:cTn id="1" dur="indefinite" restart="never" nodeType="tmRoot"/>
-      </p:par>
-    </p:tnLst>
-  </p:timing>
 </p:sld>
 </file>
 
@@ -4608,27 +4236,7 @@
                 <a:latin typeface="Microsoft JhengHei" pitchFamily="34" charset="-120"/>
                 <a:ea typeface="Microsoft JhengHei" pitchFamily="34" charset="-120"/>
               </a:rPr>
-              <a:t>神同在 </a:t>
-            </a:r>
-            <a:r>
-              <a:rPr lang="zh-TW" altLang="en-US" sz="6400" b="1" dirty="0">
-                <a:solidFill>
-                  <a:srgbClr val="660033"/>
-                </a:solidFill>
-                <a:latin typeface="Microsoft JhengHei" pitchFamily="34" charset="-120"/>
-                <a:ea typeface="Microsoft JhengHei" pitchFamily="34" charset="-120"/>
-              </a:rPr>
-              <a:t> 神</a:t>
-            </a:r>
-            <a:r>
-              <a:rPr lang="zh-TW" altLang="en-US" sz="6400" b="1" dirty="0">
-                <a:solidFill>
-                  <a:srgbClr val="660033"/>
-                </a:solidFill>
-                <a:latin typeface="Microsoft JhengHei" pitchFamily="34" charset="-120"/>
-                <a:ea typeface="Microsoft JhengHei" pitchFamily="34" charset="-120"/>
-              </a:rPr>
-              <a:t>同在</a:t>
+              <a:t>神同在  神同在</a:t>
             </a:r>
             <a:endParaRPr lang="en-US" altLang="zh-TW" sz="6400" b="1" dirty="0">
               <a:solidFill>
@@ -4669,39 +4277,7 @@
                   <a:srgbClr val="660033"/>
                 </a:solidFill>
               </a:rPr>
-              <a:t>( </a:t>
-            </a:r>
-            <a:r>
-              <a:rPr lang="en-US" sz="3733" b="1" dirty="0">
-                <a:solidFill>
-                  <a:srgbClr val="660033"/>
-                </a:solidFill>
-              </a:rPr>
-              <a:t>2 </a:t>
-            </a:r>
-            <a:r>
-              <a:rPr lang="en-US" sz="3733" b="1" dirty="0">
-                <a:solidFill>
-                  <a:srgbClr val="660033"/>
-                </a:solidFill>
-              </a:rPr>
-              <a:t>/ </a:t>
-            </a:r>
-            <a:r>
-              <a:rPr lang="en-US" sz="3733" b="1" dirty="0">
-                <a:solidFill>
-                  <a:srgbClr val="660033"/>
-                </a:solidFill>
-              </a:rPr>
-              <a:t>3 </a:t>
-            </a:r>
-            <a:r>
-              <a:rPr lang="en-US" sz="3733" b="1" dirty="0">
-                <a:solidFill>
-                  <a:srgbClr val="660033"/>
-                </a:solidFill>
-              </a:rPr>
-              <a:t>)</a:t>
+              <a:t>( 2 / 3 )</a:t>
             </a:r>
             <a:endParaRPr lang="vi-VN" sz="3733" b="1" dirty="0">
               <a:solidFill>
@@ -4721,13 +4297,6 @@
   <p:clrMapOvr>
     <a:masterClrMapping/>
   </p:clrMapOvr>
-  <p:timing>
-    <p:tnLst>
-      <p:par>
-        <p:cTn id="1" dur="indefinite" restart="never" nodeType="tmRoot"/>
-      </p:par>
-    </p:tnLst>
-  </p:timing>
 </p:sld>
 </file>
 
@@ -4796,27 +4365,7 @@
                 <a:latin typeface="Microsoft JhengHei" pitchFamily="34" charset="-120"/>
                 <a:ea typeface="Microsoft JhengHei" pitchFamily="34" charset="-120"/>
               </a:rPr>
-              <a:t>神同在 </a:t>
-            </a:r>
-            <a:r>
-              <a:rPr lang="zh-TW" altLang="en-US" sz="6400" b="1" dirty="0">
-                <a:solidFill>
-                  <a:srgbClr val="660033"/>
-                </a:solidFill>
-                <a:latin typeface="Microsoft JhengHei" pitchFamily="34" charset="-120"/>
-                <a:ea typeface="Microsoft JhengHei" pitchFamily="34" charset="-120"/>
-              </a:rPr>
-              <a:t> 常</a:t>
-            </a:r>
-            <a:r>
-              <a:rPr lang="zh-TW" altLang="en-US" sz="6400" b="1" dirty="0">
-                <a:solidFill>
-                  <a:srgbClr val="660033"/>
-                </a:solidFill>
-                <a:latin typeface="Microsoft JhengHei" pitchFamily="34" charset="-120"/>
-                <a:ea typeface="Microsoft JhengHei" pitchFamily="34" charset="-120"/>
-              </a:rPr>
-              <a:t>同在</a:t>
+              <a:t>神同在  常同在</a:t>
             </a:r>
           </a:p>
         </p:txBody>
@@ -4850,39 +4399,7 @@
                   <a:srgbClr val="660033"/>
                 </a:solidFill>
               </a:rPr>
-              <a:t>( </a:t>
-            </a:r>
-            <a:r>
-              <a:rPr lang="en-US" sz="3733" b="1" dirty="0">
-                <a:solidFill>
-                  <a:srgbClr val="660033"/>
-                </a:solidFill>
-              </a:rPr>
-              <a:t>2 </a:t>
-            </a:r>
-            <a:r>
-              <a:rPr lang="en-US" sz="3733" b="1" dirty="0">
-                <a:solidFill>
-                  <a:srgbClr val="660033"/>
-                </a:solidFill>
-              </a:rPr>
-              <a:t>/ </a:t>
-            </a:r>
-            <a:r>
-              <a:rPr lang="en-US" sz="3733" b="1" dirty="0">
-                <a:solidFill>
-                  <a:srgbClr val="660033"/>
-                </a:solidFill>
-              </a:rPr>
-              <a:t>3 </a:t>
-            </a:r>
-            <a:r>
-              <a:rPr lang="en-US" sz="3733" b="1" dirty="0">
-                <a:solidFill>
-                  <a:srgbClr val="660033"/>
-                </a:solidFill>
-              </a:rPr>
-              <a:t>)</a:t>
+              <a:t>( 2 / 3 )</a:t>
             </a:r>
             <a:endParaRPr lang="vi-VN" sz="3733" b="1" dirty="0">
               <a:solidFill>
@@ -4902,13 +4419,6 @@
   <p:clrMapOvr>
     <a:masterClrMapping/>
   </p:clrMapOvr>
-  <p:timing>
-    <p:tnLst>
-      <p:par>
-        <p:cTn id="1" dur="indefinite" restart="never" nodeType="tmRoot"/>
-      </p:par>
-    </p:tnLst>
-  </p:timing>
 </p:sld>
 </file>
 
@@ -4962,27 +4472,7 @@
                 <a:latin typeface="Microsoft JhengHei" pitchFamily="34" charset="-120"/>
                 <a:ea typeface="Microsoft JhengHei" pitchFamily="34" charset="-120"/>
               </a:rPr>
-              <a:t>神同</a:t>
-            </a:r>
-            <a:r>
-              <a:rPr lang="zh-TW" altLang="en-US" sz="6400" b="1" dirty="0">
-                <a:solidFill>
-                  <a:srgbClr val="660033"/>
-                </a:solidFill>
-                <a:latin typeface="Microsoft JhengHei" pitchFamily="34" charset="-120"/>
-                <a:ea typeface="Microsoft JhengHei" pitchFamily="34" charset="-120"/>
-              </a:rPr>
-              <a:t>在  常</a:t>
-            </a:r>
-            <a:r>
-              <a:rPr lang="zh-TW" altLang="en-US" sz="6400" b="1" dirty="0">
-                <a:solidFill>
-                  <a:srgbClr val="660033"/>
-                </a:solidFill>
-                <a:latin typeface="Microsoft JhengHei" pitchFamily="34" charset="-120"/>
-                <a:ea typeface="Microsoft JhengHei" pitchFamily="34" charset="-120"/>
-              </a:rPr>
-              <a:t>同在</a:t>
+              <a:t>神同在  常同在</a:t>
             </a:r>
           </a:p>
           <a:p>
@@ -5019,13 +4509,6 @@
   <p:clrMapOvr>
     <a:masterClrMapping/>
   </p:clrMapOvr>
-  <p:timing>
-    <p:tnLst>
-      <p:par>
-        <p:cTn id="1" dur="indefinite" restart="never" nodeType="tmRoot"/>
-      </p:par>
-    </p:tnLst>
-  </p:timing>
 </p:sld>
 </file>
 
@@ -5079,17 +4562,17 @@
                 <a:latin typeface="Microsoft JhengHei" pitchFamily="34" charset="-120"/>
                 <a:ea typeface="Microsoft JhengHei" pitchFamily="34" charset="-120"/>
               </a:rPr>
-              <a:t>我願信靠祂應</a:t>
-            </a:r>
-            <a:r>
-              <a:rPr lang="zh-TW" altLang="en-US" sz="6400" b="1" dirty="0">
+              <a:t>我願信靠祂應許  祂</a:t>
+            </a:r>
+            <a:r>
+              <a:rPr lang="zh-CN" altLang="en-US" sz="6400" b="1" dirty="0">
                 <a:solidFill>
                   <a:srgbClr val="660033"/>
                 </a:solidFill>
                 <a:latin typeface="Microsoft JhengHei" pitchFamily="34" charset="-120"/>
                 <a:ea typeface="Microsoft JhengHei" pitchFamily="34" charset="-120"/>
               </a:rPr>
-              <a:t>許  祂</a:t>
+              <a:t>守</a:t>
             </a:r>
             <a:r>
               <a:rPr lang="zh-TW" altLang="en-US" sz="6400" b="1" dirty="0">
@@ -5099,17 +4582,7 @@
                 <a:latin typeface="Microsoft JhengHei" pitchFamily="34" charset="-120"/>
                 <a:ea typeface="Microsoft JhengHei" pitchFamily="34" charset="-120"/>
               </a:rPr>
-              <a:t>手信實到萬</a:t>
-            </a:r>
-            <a:r>
-              <a:rPr lang="zh-TW" altLang="en-US" sz="6400" b="1" dirty="0">
-                <a:solidFill>
-                  <a:srgbClr val="660033"/>
-                </a:solidFill>
-                <a:latin typeface="Microsoft JhengHei" pitchFamily="34" charset="-120"/>
-                <a:ea typeface="Microsoft JhengHei" pitchFamily="34" charset="-120"/>
-              </a:rPr>
-              <a:t>代</a:t>
+              <a:t>信實到萬代</a:t>
             </a:r>
             <a:endParaRPr lang="en-US" altLang="zh-TW" sz="6400" b="1" dirty="0">
               <a:solidFill>
@@ -5131,25 +4604,8 @@
                 <a:latin typeface="Microsoft JhengHei" pitchFamily="34" charset="-120"/>
                 <a:ea typeface="Microsoft JhengHei" pitchFamily="34" charset="-120"/>
               </a:rPr>
-              <a:t>當我真需要一友神同</a:t>
-            </a:r>
-            <a:r>
-              <a:rPr lang="zh-TW" altLang="en-US" sz="6400" b="1" dirty="0">
-                <a:solidFill>
-                  <a:srgbClr val="660033"/>
-                </a:solidFill>
-                <a:latin typeface="Microsoft JhengHei" pitchFamily="34" charset="-120"/>
-                <a:ea typeface="Microsoft JhengHei" pitchFamily="34" charset="-120"/>
-              </a:rPr>
-              <a:t>在</a:t>
-            </a:r>
-            <a:endParaRPr lang="zh-TW" altLang="en-US" sz="6400" b="1" dirty="0">
-              <a:solidFill>
-                <a:srgbClr val="660033"/>
-              </a:solidFill>
-              <a:latin typeface="Microsoft JhengHei" pitchFamily="34" charset="-120"/>
-              <a:ea typeface="Microsoft JhengHei" pitchFamily="34" charset="-120"/>
-            </a:endParaRPr>
+              <a:t>當我真需要一友  神同在</a:t>
+            </a:r>
           </a:p>
         </p:txBody>
       </p:sp>
@@ -5163,13 +4619,6 @@
   <p:clrMapOvr>
     <a:masterClrMapping/>
   </p:clrMapOvr>
-  <p:timing>
-    <p:tnLst>
-      <p:par>
-        <p:cTn id="1" dur="indefinite" restart="never" nodeType="tmRoot"/>
-      </p:par>
-    </p:tnLst>
-  </p:timing>
 </p:sld>
 </file>
 
